--- a/backend/docs/report/NinaivX-Presentation-Full.pptx
+++ b/backend/docs/report/NinaivX-Presentation-Full.pptx
@@ -585,7 +585,7 @@
           <a:lstStyle/>
           <a:p>
             <a:r>
-              <a:t>The second evaluation is the one I'm most pleased with — a controlled experiment. Same AI model on both sides; the only difference was NinaivX's grounding versus an unconstrained baseline. Grounding cut the overall fabrication rate from 83% to 28%, and fabrication about events after the person's death fell from 100% to essentially zero. It doesn't fully stop invented personal facts — and that's exactly what the future retrieval work is for. This directly answers RQ1.</a:t>
+              <a:t>The second evaluation is the one I'm most pleased with — a controlled experiment. Same AI model on both sides; the only difference was NinaivX's grounding versus an unconstrained baseline. Grounding cut the overall hallucination rate from 83% to 28%, and hallucination about events after the person's death fell from 100% to essentially zero. It doesn't fully stop invented personal facts — and that's exactly what the future retrieval work is for. This directly answers RQ1.</a:t>
             </a:r>
           </a:p>
         </p:txBody>
@@ -655,7 +655,7 @@
           <a:lstStyle/>
           <a:p>
             <a:r>
-              <a:t>So both questions are answered. RQ1: yes — fabrication measurably down, quality preserved. RQ2: yes — one architecture, two safe personas, and transparency that users noticed. I'm also honest about the limitation: grounding personal facts by prompt alone isn't enough, which points straight at the next step.</a:t>
+              <a:t>So both questions are answered. RQ1: yes — hallucination measurably down, quality preserved. RQ2: yes — one architecture, two safe personas, and transparency that users noticed. I'm also honest about the limitation: grounding personal facts by prompt alone isn't enough, which points straight at the next step.</a:t>
             </a:r>
           </a:p>
         </p:txBody>
@@ -865,7 +865,7 @@
           <a:lstStyle/>
           <a:p>
             <a:r>
-              <a:t>VIVA QUICK FACTS: Model = Claude Sonnet on AWS Bedrock (EU region). Stack = FastAPI + LangGraph backend, Supabase auth/DB, ElevenLabs voice, React Native/Expo app. Air-gap = deceased node binds no tools (code-level). Fabrication result: 83%-&gt;28% overall, 100%-&gt;~0% post-death. User study n=21, mean 4.6/5. Why deterministic router? So the safety-critical routing can't be manipulated by a message. Ethics: Sheffield ref 076699, anonymous, adults-only, grief screening. Biggest limitation: personal-fact confabulation -&gt; fix with RAG.</a:t>
+              <a:t>VIVA QUICK FACTS: Model = Claude Sonnet on AWS Bedrock (EU region). Stack = FastAPI + LangGraph backend, Supabase auth/DB, ElevenLabs voice, React Native/Expo app. Air-gap = deceased node binds no tools (code-level). Hallucination result: 83%-&gt;28% overall, 100%-&gt;~0% post-death. User study n=21, mean 4.6/5. Why deterministic router? So the safety-critical routing can't be manipulated by a message. Ethics: Sheffield ref 076699, anonymous, adults-only, grief screening. Biggest limitation: personal-fact confabulation -&gt; fix with RAG.</a:t>
             </a:r>
           </a:p>
         </p:txBody>
@@ -1075,7 +1075,7 @@
           <a:lstStyle/>
           <a:p>
             <a:r>
-              <a:t>The aim is to build and evaluate such a system. Two research questions drive it. RQ1 is about safety versus quality — can we cut fabrication without making the conversation worse? RQ2 is architectural — can one system safely serve two very different personas? Keep these two in mind; I'll answer both with evidence.</a:t>
+              <a:t>The aim is to build and evaluate such a system. Two research questions drive it. RQ1 is about safety versus quality — can we cut hallucination without making the conversation worse? RQ2 is architectural — can one system safely serve two very different personas? Keep these two in mind; I'll answer both with evidence.</a:t>
             </a:r>
           </a:p>
         </p:txBody>
@@ -4738,7 +4738,7 @@
                 </a:solidFill>
                 <a:latin typeface="Segoe UI"/>
               </a:rPr>
-              <a:t>Evaluation 2 — controlled fabrication test</a:t>
+              <a:t>Evaluation 2 — controlled hallucination test</a:t>
             </a:r>
           </a:p>
         </p:txBody>
@@ -4934,7 +4934,7 @@
                 </a:solidFill>
                 <a:latin typeface="Segoe UI"/>
               </a:rPr>
-              <a:t>overall fabrication rate</a:t>
+              <a:t>overall hallucination rate</a:t>
             </a:r>
           </a:p>
         </p:txBody>
@@ -5027,7 +5027,7 @@
                 </a:solidFill>
                 <a:latin typeface="Segoe UI"/>
               </a:rPr>
-              <a:t>fabrication about events after death</a:t>
+              <a:t>hallucination about events after death</a:t>
             </a:r>
           </a:p>
         </p:txBody>
@@ -5324,7 +5324,7 @@
                 </a:solidFill>
                 <a:latin typeface="Segoe UI"/>
               </a:rPr>
-              <a:t>RQ1 ✓  The design measurably reduces fabrication (83% → 28%) and keeps conversational quality (mean 4.6).</a:t>
+              <a:t>RQ1 ✓  The design measurably reduces hallucination (83% → 28%) and keeps conversational quality (mean 4.6).</a:t>
             </a:r>
           </a:p>
           <a:p>
@@ -6669,7 +6669,7 @@
                 </a:solidFill>
                 <a:latin typeface="Segoe UI"/>
               </a:rPr>
-              <a:t>But generative AI fabricates — it produces confident, false detail.</a:t>
+              <a:t>But generative AI hallucinates — it produces confident, false detail.</a:t>
             </a:r>
           </a:p>
           <a:p>
@@ -7015,7 +7015,7 @@
                 </a:solidFill>
                 <a:latin typeface="Segoe UI"/>
               </a:rPr>
-              <a:t>no safety mechanism against fabrication</a:t>
+              <a:t>no safety mechanism against hallucination</a:t>
             </a:r>
           </a:p>
           <a:p>
@@ -7451,7 +7451,7 @@
                 </a:solidFill>
                 <a:latin typeface="Segoe UI"/>
               </a:rPr>
-              <a:t>Can an air-gapped, grounded design reduce factual fabrication while keeping conversational quality?</a:t>
+              <a:t>Can an air-gapped, grounded design reduce hallucination while keeping conversational quality?</a:t>
             </a:r>
           </a:p>
         </p:txBody>
@@ -8498,7 +8498,7 @@
                 </a:solidFill>
                 <a:latin typeface="Segoe UI"/>
               </a:rPr>
-              <a:t>Air-gap = a code-level guarantee — the deceased node has no tools, so fabrication from live data is impossible.</a:t>
+              <a:t>Air-gap = a code-level guarantee — the deceased node has no tools, so hallucination from live data is impossible.</a:t>
             </a:r>
           </a:p>
           <a:p>

--- a/backend/docs/report/NinaivX-Presentation-Full.pptx
+++ b/backend/docs/report/NinaivX-Presentation-Full.pptx
@@ -865,7 +865,7 @@
           <a:lstStyle/>
           <a:p>
             <a:r>
-              <a:t>VIVA QUICK FACTS: Model = Claude Sonnet on AWS Bedrock (EU region). Stack = FastAPI + LangGraph backend, Supabase auth/DB, ElevenLabs voice, React Native/Expo app. Air-gap = deceased node binds no tools (code-level). Hallucination result: 83%-&gt;28% overall, 100%-&gt;~0% post-death. User study n=21, mean 4.6/5. Why deterministic router? So the safety-critical routing can't be manipulated by a message. Ethics: Sheffield ref 076699, anonymous, adults-only, grief screening. Biggest limitation: personal-fact confabulation -&gt; fix with RAG.</a:t>
+              <a:t>VIVA QUICK FACTS: Model = Claude Sonnet on AWS Bedrock (EU region). Stack = FastAPI + LangGraph backend, Supabase auth/DB, ElevenLabs voice, React Native/Expo app. Air-gap = deceased node binds no tools (code-level). Hallucination result: 83%-&gt;28% overall, 100%-&gt;7% post-death (the 1 flagged case actually declined correctly, so effectively 0). User study n=21, mean 4.6/5. Why deterministic router? So the safety-critical routing can't be manipulated by a message. Ethics: Sheffield ref 076699, anonymous, adults-only, grief screening. Biggest limitation: personal-fact confabulation -&gt; fix with RAG.</a:t>
             </a:r>
           </a:p>
         </p:txBody>
@@ -5015,7 +5015,7 @@
                 </a:solidFill>
                 <a:latin typeface="Segoe UI"/>
               </a:rPr>
-              <a:t>100%  →  ~0%</a:t>
+              <a:t>100%  →  7%</a:t>
             </a:r>
           </a:p>
           <a:p>

--- a/backend/docs/report/NinaivX-Presentation-Full.pptx
+++ b/backend/docs/report/NinaivX-Presentation-Full.pptx
@@ -585,7 +585,7 @@
           <a:lstStyle/>
           <a:p>
             <a:r>
-              <a:t>The second evaluation is the one I'm most pleased with — a controlled experiment. Same AI model on both sides; the only difference was NinaivX's grounding versus an unconstrained baseline. Grounding cut the overall hallucination rate from 83% to 28%, and hallucination about events after the person's death fell from 100% to essentially zero. It doesn't fully stop invented personal facts — and that's exactly what the future retrieval work is for. This directly answers RQ1.</a:t>
+              <a:t>The second evaluation is the one I'm most pleased with — a controlled experiment. Same AI model on both sides; the only difference was NinaivX's grounding versus an unconstrained baseline. Grounding cut the overall hallucination rate from 83% to 25%, and hallucination about events after the person's death fell from 100% to zero. It doesn't fully stop invented personal facts — and that's exactly what the future retrieval work is for. This directly answers RQ1.</a:t>
             </a:r>
           </a:p>
         </p:txBody>
@@ -865,7 +865,7 @@
           <a:lstStyle/>
           <a:p>
             <a:r>
-              <a:t>VIVA QUICK FACTS: Model = Claude Sonnet on AWS Bedrock (EU region). Stack = FastAPI + LangGraph backend, Supabase auth/DB, ElevenLabs voice, React Native/Expo app. Air-gap = deceased node binds no tools (code-level). Hallucination result: 83%-&gt;28% overall, 100%-&gt;7% post-death (the 1 flagged case actually declined correctly, so effectively 0). User study n=21, mean 4.6/5. Why deterministic router? So the safety-critical routing can't be manipulated by a message. Ethics: Sheffield ref 076699, anonymous, adults-only, grief screening. Biggest limitation: personal-fact confabulation -&gt; fix with RAG.</a:t>
+              <a:t>VIVA QUICK FACTS: Model = Claude Sonnet on AWS Bedrock (EU region). Stack = FastAPI + LangGraph backend, Supabase auth/DB, ElevenLabs voice, React Native/Expo app. Air-gap = deceased node binds no tools (code-level). Hallucination result: 83%-&gt;25% overall, 100%-&gt;0% post-death (declined every post-death question). User study n=21, mean 4.6/5. Why deterministic router? So the safety-critical routing can't be manipulated by a message. Ethics: Sheffield ref 076699, anonymous, adults-only, grief screening. Biggest limitation: personal-fact confabulation -&gt; fix with RAG.</a:t>
             </a:r>
           </a:p>
         </p:txBody>
@@ -4922,7 +4922,7 @@
                 </a:solidFill>
                 <a:latin typeface="Segoe UI"/>
               </a:rPr>
-              <a:t>83%  →  28%</a:t>
+              <a:t>83%  →  25%</a:t>
             </a:r>
           </a:p>
           <a:p>
@@ -5015,7 +5015,7 @@
                 </a:solidFill>
                 <a:latin typeface="Segoe UI"/>
               </a:rPr>
-              <a:t>100%  →  7%</a:t>
+              <a:t>100%  →  0%</a:t>
             </a:r>
           </a:p>
           <a:p>
@@ -5324,7 +5324,7 @@
                 </a:solidFill>
                 <a:latin typeface="Segoe UI"/>
               </a:rPr>
-              <a:t>RQ1 ✓  The design measurably reduces hallucination (83% → 28%) and keeps conversational quality (mean 4.6).</a:t>
+              <a:t>RQ1 ✓  The design measurably reduces hallucination (83% → 25%) and keeps conversational quality (mean 4.6).</a:t>
             </a:r>
           </a:p>
           <a:p>
